--- a/Lab Materials/Day 1 - Lab Materials/Set-Up/Lab Overview.pptx
+++ b/Lab Materials/Day 1 - Lab Materials/Set-Up/Lab Overview.pptx
@@ -125,7 +125,7 @@
 <file path=ppt/revisionInfo.xml><?xml version="1.0" encoding="utf-8"?>
 <p1510:revInfo xmlns:a="http://schemas.openxmlformats.org/drawingml/2006/main" xmlns:r="http://schemas.openxmlformats.org/officeDocument/2006/relationships" xmlns:p1510="http://schemas.microsoft.com/office/powerpoint/2015/10/main">
   <p1510:revLst>
-    <p1510:client id="{C17FE116-2D61-4EAD-8D75-CBCC54B8174F}" v="22" dt="2026-07-19T02:24:39.844"/>
+    <p1510:client id="{F8AF3247-C054-47D8-BB9D-1DD4A9CA5E1B}" v="2" dt="2026-07-21T20:03:59.822"/>
   </p1510:revLst>
 </p1510:revInfo>
 </file>
@@ -135,7 +135,7 @@
   <pc:docChgLst>
     <pc:chgData name="ambleic@clemson.edu" userId="43615028507_tp_box_2" providerId="OAuth2" clId="{5F4B9ABB-DEB5-4DC3-A8F9-1752A2D02C85}"/>
     <pc:docChg chg="modSld">
-      <pc:chgData name="ambleic@clemson.edu" userId="43615028507_tp_box_2" providerId="OAuth2" clId="{5F4B9ABB-DEB5-4DC3-A8F9-1752A2D02C85}" dt="2026-07-19T02:38:48" v="43" actId="20577"/>
+      <pc:chgData name="ambleic@clemson.edu" userId="43615028507_tp_box_2" providerId="OAuth2" clId="{5F4B9ABB-DEB5-4DC3-A8F9-1752A2D02C85}" dt="2026-07-21T20:03:59.822" v="45"/>
       <pc:docMkLst>
         <pc:docMk/>
       </pc:docMkLst>
@@ -155,13 +155,13 @@
         </pc:spChg>
       </pc:sldChg>
       <pc:sldChg chg="modSp">
-        <pc:chgData name="ambleic@clemson.edu" userId="43615028507_tp_box_2" providerId="OAuth2" clId="{5F4B9ABB-DEB5-4DC3-A8F9-1752A2D02C85}" dt="2026-07-19T02:22:13.315" v="0"/>
+        <pc:chgData name="ambleic@clemson.edu" userId="43615028507_tp_box_2" providerId="OAuth2" clId="{5F4B9ABB-DEB5-4DC3-A8F9-1752A2D02C85}" dt="2026-07-21T20:03:55.769" v="44"/>
         <pc:sldMkLst>
           <pc:docMk/>
           <pc:sldMk cId="0" sldId="259"/>
         </pc:sldMkLst>
         <pc:spChg chg="mod">
-          <ac:chgData name="ambleic@clemson.edu" userId="43615028507_tp_box_2" providerId="OAuth2" clId="{5F4B9ABB-DEB5-4DC3-A8F9-1752A2D02C85}" dt="2026-07-19T02:22:13.315" v="0"/>
+          <ac:chgData name="ambleic@clemson.edu" userId="43615028507_tp_box_2" providerId="OAuth2" clId="{5F4B9ABB-DEB5-4DC3-A8F9-1752A2D02C85}" dt="2026-07-21T20:03:55.769" v="44"/>
           <ac:spMkLst>
             <pc:docMk/>
             <pc:sldMk cId="0" sldId="259"/>
@@ -200,13 +200,13 @@
         </pc:spChg>
       </pc:sldChg>
       <pc:sldChg chg="modSp mod">
-        <pc:chgData name="ambleic@clemson.edu" userId="43615028507_tp_box_2" providerId="OAuth2" clId="{5F4B9ABB-DEB5-4DC3-A8F9-1752A2D02C85}" dt="2026-07-19T02:23:35.918" v="10" actId="20577"/>
+        <pc:chgData name="ambleic@clemson.edu" userId="43615028507_tp_box_2" providerId="OAuth2" clId="{5F4B9ABB-DEB5-4DC3-A8F9-1752A2D02C85}" dt="2026-07-21T20:03:59.822" v="45"/>
         <pc:sldMkLst>
           <pc:docMk/>
           <pc:sldMk cId="3886218017" sldId="426"/>
         </pc:sldMkLst>
         <pc:spChg chg="mod">
-          <ac:chgData name="ambleic@clemson.edu" userId="43615028507_tp_box_2" providerId="OAuth2" clId="{5F4B9ABB-DEB5-4DC3-A8F9-1752A2D02C85}" dt="2026-07-19T02:23:35.918" v="10" actId="20577"/>
+          <ac:chgData name="ambleic@clemson.edu" userId="43615028507_tp_box_2" providerId="OAuth2" clId="{5F4B9ABB-DEB5-4DC3-A8F9-1752A2D02C85}" dt="2026-07-21T20:03:59.822" v="45"/>
           <ac:spMkLst>
             <pc:docMk/>
             <pc:sldMk cId="3886218017" sldId="426"/>
@@ -301,7 +301,7 @@
           <a:p>
             <a:fld id="{2F95FFF5-D7E8-43B0-9B88-DCCCDD5FE410}" type="datetimeFigureOut">
               <a:rPr lang="en-US" smtClean="0"/>
-              <a:t>7/18/2026</a:t>
+              <a:t>7/21/2026</a:t>
             </a:fld>
             <a:endParaRPr lang="en-US"/>
           </a:p>
@@ -1291,7 +1291,7 @@
           <a:p>
             <a:fld id="{F9AB7640-48C3-429B-ABC5-E59EA07AF4B3}" type="datetimeFigureOut">
               <a:rPr lang="en-US" smtClean="0"/>
-              <a:t>7/18/2026</a:t>
+              <a:t>7/21/2026</a:t>
             </a:fld>
             <a:endParaRPr lang="en-US"/>
           </a:p>
@@ -1489,7 +1489,7 @@
           <a:p>
             <a:fld id="{F9AB7640-48C3-429B-ABC5-E59EA07AF4B3}" type="datetimeFigureOut">
               <a:rPr lang="en-US" smtClean="0"/>
-              <a:t>7/18/2026</a:t>
+              <a:t>7/21/2026</a:t>
             </a:fld>
             <a:endParaRPr lang="en-US"/>
           </a:p>
@@ -1697,7 +1697,7 @@
           <a:p>
             <a:fld id="{F9AB7640-48C3-429B-ABC5-E59EA07AF4B3}" type="datetimeFigureOut">
               <a:rPr lang="en-US" smtClean="0"/>
-              <a:t>7/18/2026</a:t>
+              <a:t>7/21/2026</a:t>
             </a:fld>
             <a:endParaRPr lang="en-US"/>
           </a:p>
@@ -1930,7 +1930,7 @@
           <a:p>
             <a:fld id="{F9AB7640-48C3-429B-ABC5-E59EA07AF4B3}" type="datetimeFigureOut">
               <a:rPr lang="en-US" smtClean="0"/>
-              <a:t>7/18/2026</a:t>
+              <a:t>7/21/2026</a:t>
             </a:fld>
             <a:endParaRPr lang="en-US"/>
           </a:p>
@@ -2205,7 +2205,7 @@
           <a:p>
             <a:fld id="{F9AB7640-48C3-429B-ABC5-E59EA07AF4B3}" type="datetimeFigureOut">
               <a:rPr lang="en-US" smtClean="0"/>
-              <a:t>7/18/2026</a:t>
+              <a:t>7/21/2026</a:t>
             </a:fld>
             <a:endParaRPr lang="en-US"/>
           </a:p>
@@ -2470,7 +2470,7 @@
           <a:p>
             <a:fld id="{F9AB7640-48C3-429B-ABC5-E59EA07AF4B3}" type="datetimeFigureOut">
               <a:rPr lang="en-US" smtClean="0"/>
-              <a:t>7/18/2026</a:t>
+              <a:t>7/21/2026</a:t>
             </a:fld>
             <a:endParaRPr lang="en-US"/>
           </a:p>
@@ -2882,7 +2882,7 @@
           <a:p>
             <a:fld id="{F9AB7640-48C3-429B-ABC5-E59EA07AF4B3}" type="datetimeFigureOut">
               <a:rPr lang="en-US" smtClean="0"/>
-              <a:t>7/18/2026</a:t>
+              <a:t>7/21/2026</a:t>
             </a:fld>
             <a:endParaRPr lang="en-US"/>
           </a:p>
@@ -3023,7 +3023,7 @@
           <a:p>
             <a:fld id="{F9AB7640-48C3-429B-ABC5-E59EA07AF4B3}" type="datetimeFigureOut">
               <a:rPr lang="en-US" smtClean="0"/>
-              <a:t>7/18/2026</a:t>
+              <a:t>7/21/2026</a:t>
             </a:fld>
             <a:endParaRPr lang="en-US"/>
           </a:p>
@@ -3136,7 +3136,7 @@
           <a:p>
             <a:fld id="{F9AB7640-48C3-429B-ABC5-E59EA07AF4B3}" type="datetimeFigureOut">
               <a:rPr lang="en-US" smtClean="0"/>
-              <a:t>7/18/2026</a:t>
+              <a:t>7/21/2026</a:t>
             </a:fld>
             <a:endParaRPr lang="en-US"/>
           </a:p>
@@ -3447,7 +3447,7 @@
           <a:p>
             <a:fld id="{F9AB7640-48C3-429B-ABC5-E59EA07AF4B3}" type="datetimeFigureOut">
               <a:rPr lang="en-US" smtClean="0"/>
-              <a:t>7/18/2026</a:t>
+              <a:t>7/21/2026</a:t>
             </a:fld>
             <a:endParaRPr lang="en-US"/>
           </a:p>
@@ -3735,7 +3735,7 @@
           <a:p>
             <a:fld id="{F9AB7640-48C3-429B-ABC5-E59EA07AF4B3}" type="datetimeFigureOut">
               <a:rPr lang="en-US" smtClean="0"/>
-              <a:t>7/18/2026</a:t>
+              <a:t>7/21/2026</a:t>
             </a:fld>
             <a:endParaRPr lang="en-US"/>
           </a:p>
@@ -3976,7 +3976,7 @@
           <a:p>
             <a:fld id="{F9AB7640-48C3-429B-ABC5-E59EA07AF4B3}" type="datetimeFigureOut">
               <a:rPr lang="en-US" smtClean="0"/>
-              <a:t>7/18/2026</a:t>
+              <a:t>7/21/2026</a:t>
             </a:fld>
             <a:endParaRPr lang="en-US"/>
           </a:p>
@@ -6005,7 +6005,7 @@
                 <a:ea typeface="Trebuchet MS" pitchFamily="34" charset="-122"/>
                 <a:cs typeface="Arial" panose="020B0604020202020204" pitchFamily="34" charset="0"/>
               </a:rPr>
-              <a:t>Incremental Revisions</a:t>
+              <a:t>Refinement</a:t>
             </a:r>
             <a:endParaRPr lang="en-US" sz="2000" dirty="0">
               <a:solidFill>
@@ -10861,7 +10861,7 @@
                 <a:ea typeface="Trebuchet MS" pitchFamily="34" charset="-122"/>
                 <a:cs typeface="Arial" panose="020B0604020202020204" pitchFamily="34" charset="0"/>
               </a:rPr>
-              <a:t>Incremental Revisions</a:t>
+              <a:t>Refinement</a:t>
             </a:r>
           </a:p>
         </p:txBody>
